--- a/class/cloud_infra_mgmt/01주차_클라우드개념_Docker입문/01_강의자료/3차시_Docker데몬심화와nginx실습.pptx
+++ b/class/cloud_infra_mgmt/01주차_클라우드개념_Docker입문/01_강의자료/3차시_Docker데몬심화와nginx실습.pptx
@@ -5359,7 +5359,7 @@
           <a:p>
             <a:pPr>
               <a:lnSpc>
-                <a:spcPct val="115000"/>
+                <a:spcPct val="149500"/>
               </a:lnSpc>
             </a:pPr>
             <a:r>
@@ -5384,7 +5384,7 @@
           <a:p>
             <a:pPr>
               <a:lnSpc>
-                <a:spcPct val="115000"/>
+                <a:spcPct val="149500"/>
               </a:lnSpc>
             </a:pPr>
             <a:r>
@@ -5409,7 +5409,7 @@
           <a:p>
             <a:pPr>
               <a:lnSpc>
-                <a:spcPct val="115000"/>
+                <a:spcPct val="149500"/>
               </a:lnSpc>
             </a:pPr>
             <a:r>
@@ -5434,13 +5434,13 @@
           <a:p>
             <a:pPr>
               <a:lnSpc>
-                <a:spcPct val="115000"/>
+                <a:spcPct val="149500"/>
               </a:lnSpc>
             </a:pPr>
             <a:r>
               <a:rPr sz="1700" b="1">
                 <a:solidFill>
-                  <a:srgbClr val="0D9488"/>
+                  <a:srgbClr val="DC2626"/>
                 </a:solidFill>
                 <a:latin typeface="맑은 고딕"/>
               </a:rPr>
@@ -5453,7 +5453,7 @@
                 </a:solidFill>
                 <a:latin typeface="맑은 고딕"/>
               </a:rPr>
-              <a:t>⚠ Killercoda 60분 제한 — 초기화돼도 VM에서 이어가면 OK</a:t>
+              <a:t>Killercoda 60분 제한 — 초기화돼도 VM에서 이어가면 OK</a:t>
             </a:r>
           </a:p>
         </p:txBody>
@@ -5825,7 +5825,7 @@
           <a:p>
             <a:pPr>
               <a:lnSpc>
-                <a:spcPct val="115000"/>
+                <a:spcPct val="149500"/>
               </a:lnSpc>
             </a:pPr>
             <a:r>
@@ -5850,7 +5850,7 @@
           <a:p>
             <a:pPr>
               <a:lnSpc>
-                <a:spcPct val="115000"/>
+                <a:spcPct val="149500"/>
               </a:lnSpc>
             </a:pPr>
             <a:r>
@@ -5875,7 +5875,7 @@
           <a:p>
             <a:pPr>
               <a:lnSpc>
-                <a:spcPct val="115000"/>
+                <a:spcPct val="149500"/>
               </a:lnSpc>
             </a:pPr>
             <a:r>
@@ -5900,7 +5900,7 @@
           <a:p>
             <a:pPr>
               <a:lnSpc>
-                <a:spcPct val="115000"/>
+                <a:spcPct val="149500"/>
               </a:lnSpc>
             </a:pPr>
             <a:r>
@@ -7408,16 +7408,104 @@
       </p:sp>
       <p:sp>
         <p:nvSpPr>
-          <p:cNvPr id="7" name="Isosceles Triangle 6"/>
+          <p:cNvPr id="7" name="Rectangle 6"/>
           <p:cNvSpPr/>
           <p:nvPr/>
         </p:nvSpPr>
         <p:spPr>
-          <a:xfrm rot="5400000">
-            <a:off x="3495751" y="1673352"/>
-            <a:ext cx="146304" cy="146304"/>
-          </a:xfrm>
-          <a:prstGeom prst="triangle">
+          <a:xfrm>
+            <a:off x="5096865" y="1730959"/>
+            <a:ext cx="1995220" cy="31089"/>
+          </a:xfrm>
+          <a:prstGeom prst="rect">
+            <a:avLst/>
+          </a:prstGeom>
+          <a:solidFill>
+            <a:srgbClr val="14B8A6"/>
+          </a:solidFill>
+          <a:ln>
+            <a:noFill/>
+          </a:ln>
+          <a:effectLst/>
+        </p:spPr>
+        <p:style>
+          <a:lnRef idx="1">
+            <a:schemeClr val="accent1"/>
+          </a:lnRef>
+          <a:fillRef idx="3">
+            <a:schemeClr val="accent1"/>
+          </a:fillRef>
+          <a:effectRef idx="2">
+            <a:schemeClr val="accent1"/>
+          </a:effectRef>
+          <a:fontRef idx="minor">
+            <a:schemeClr val="lt1"/>
+          </a:fontRef>
+        </p:style>
+        <p:txBody>
+          <a:bodyPr rtlCol="0" anchor="ctr"/>
+          <a:lstStyle/>
+          <a:p>
+            <a:pPr algn="ctr"/>
+          </a:p>
+        </p:txBody>
+      </p:sp>
+      <p:sp>
+        <p:nvSpPr>
+          <p:cNvPr id="8" name="Rectangle 7"/>
+          <p:cNvSpPr/>
+          <p:nvPr/>
+        </p:nvSpPr>
+        <p:spPr>
+          <a:xfrm>
+            <a:off x="7622438" y="1730959"/>
+            <a:ext cx="1995220" cy="31089"/>
+          </a:xfrm>
+          <a:prstGeom prst="rect">
+            <a:avLst/>
+          </a:prstGeom>
+          <a:solidFill>
+            <a:srgbClr val="14B8A6"/>
+          </a:solidFill>
+          <a:ln>
+            <a:noFill/>
+          </a:ln>
+          <a:effectLst/>
+        </p:spPr>
+        <p:style>
+          <a:lnRef idx="1">
+            <a:schemeClr val="accent1"/>
+          </a:lnRef>
+          <a:fillRef idx="3">
+            <a:schemeClr val="accent1"/>
+          </a:fillRef>
+          <a:effectRef idx="2">
+            <a:schemeClr val="accent1"/>
+          </a:effectRef>
+          <a:fontRef idx="minor">
+            <a:schemeClr val="lt1"/>
+          </a:fontRef>
+        </p:style>
+        <p:txBody>
+          <a:bodyPr rtlCol="0" anchor="ctr"/>
+          <a:lstStyle/>
+          <a:p>
+            <a:pPr algn="ctr"/>
+          </a:p>
+        </p:txBody>
+      </p:sp>
+      <p:sp>
+        <p:nvSpPr>
+          <p:cNvPr id="9" name="Oval 8"/>
+          <p:cNvSpPr/>
+          <p:nvPr/>
+        </p:nvSpPr>
+        <p:spPr>
+          <a:xfrm>
+            <a:off x="2040940" y="1481328"/>
+            <a:ext cx="530352" cy="530352"/>
+          </a:xfrm>
+          <a:prstGeom prst="ellipse">
             <a:avLst/>
           </a:prstGeom>
           <a:solidFill>
@@ -7452,227 +7540,7 @@
       </p:sp>
       <p:sp>
         <p:nvSpPr>
-          <p:cNvPr id="8" name="Rectangle 7"/>
-          <p:cNvSpPr/>
-          <p:nvPr/>
-        </p:nvSpPr>
-        <p:spPr>
-          <a:xfrm>
-            <a:off x="5096865" y="1730959"/>
-            <a:ext cx="1995220" cy="31089"/>
-          </a:xfrm>
-          <a:prstGeom prst="rect">
-            <a:avLst/>
-          </a:prstGeom>
-          <a:solidFill>
-            <a:srgbClr val="14B8A6"/>
-          </a:solidFill>
-          <a:ln>
-            <a:noFill/>
-          </a:ln>
-          <a:effectLst/>
-        </p:spPr>
-        <p:style>
-          <a:lnRef idx="1">
-            <a:schemeClr val="accent1"/>
-          </a:lnRef>
-          <a:fillRef idx="3">
-            <a:schemeClr val="accent1"/>
-          </a:fillRef>
-          <a:effectRef idx="2">
-            <a:schemeClr val="accent1"/>
-          </a:effectRef>
-          <a:fontRef idx="minor">
-            <a:schemeClr val="lt1"/>
-          </a:fontRef>
-        </p:style>
-        <p:txBody>
-          <a:bodyPr rtlCol="0" anchor="ctr"/>
-          <a:lstStyle/>
-          <a:p>
-            <a:pPr algn="ctr"/>
-          </a:p>
-        </p:txBody>
-      </p:sp>
-      <p:sp>
-        <p:nvSpPr>
-          <p:cNvPr id="9" name="Isosceles Triangle 8"/>
-          <p:cNvSpPr/>
-          <p:nvPr/>
-        </p:nvSpPr>
-        <p:spPr>
-          <a:xfrm rot="5400000">
-            <a:off x="6021324" y="1673352"/>
-            <a:ext cx="146304" cy="146304"/>
-          </a:xfrm>
-          <a:prstGeom prst="triangle">
-            <a:avLst/>
-          </a:prstGeom>
-          <a:solidFill>
-            <a:srgbClr val="0D9488"/>
-          </a:solidFill>
-          <a:ln>
-            <a:noFill/>
-          </a:ln>
-          <a:effectLst/>
-        </p:spPr>
-        <p:style>
-          <a:lnRef idx="1">
-            <a:schemeClr val="accent1"/>
-          </a:lnRef>
-          <a:fillRef idx="3">
-            <a:schemeClr val="accent1"/>
-          </a:fillRef>
-          <a:effectRef idx="2">
-            <a:schemeClr val="accent1"/>
-          </a:effectRef>
-          <a:fontRef idx="minor">
-            <a:schemeClr val="lt1"/>
-          </a:fontRef>
-        </p:style>
-        <p:txBody>
-          <a:bodyPr rtlCol="0" anchor="ctr"/>
-          <a:lstStyle/>
-          <a:p>
-            <a:pPr algn="ctr"/>
-          </a:p>
-        </p:txBody>
-      </p:sp>
-      <p:sp>
-        <p:nvSpPr>
-          <p:cNvPr id="10" name="Rectangle 9"/>
-          <p:cNvSpPr/>
-          <p:nvPr/>
-        </p:nvSpPr>
-        <p:spPr>
-          <a:xfrm>
-            <a:off x="7622438" y="1730959"/>
-            <a:ext cx="1995220" cy="31089"/>
-          </a:xfrm>
-          <a:prstGeom prst="rect">
-            <a:avLst/>
-          </a:prstGeom>
-          <a:solidFill>
-            <a:srgbClr val="14B8A6"/>
-          </a:solidFill>
-          <a:ln>
-            <a:noFill/>
-          </a:ln>
-          <a:effectLst/>
-        </p:spPr>
-        <p:style>
-          <a:lnRef idx="1">
-            <a:schemeClr val="accent1"/>
-          </a:lnRef>
-          <a:fillRef idx="3">
-            <a:schemeClr val="accent1"/>
-          </a:fillRef>
-          <a:effectRef idx="2">
-            <a:schemeClr val="accent1"/>
-          </a:effectRef>
-          <a:fontRef idx="minor">
-            <a:schemeClr val="lt1"/>
-          </a:fontRef>
-        </p:style>
-        <p:txBody>
-          <a:bodyPr rtlCol="0" anchor="ctr"/>
-          <a:lstStyle/>
-          <a:p>
-            <a:pPr algn="ctr"/>
-          </a:p>
-        </p:txBody>
-      </p:sp>
-      <p:sp>
-        <p:nvSpPr>
-          <p:cNvPr id="11" name="Isosceles Triangle 10"/>
-          <p:cNvSpPr/>
-          <p:nvPr/>
-        </p:nvSpPr>
-        <p:spPr>
-          <a:xfrm rot="5400000">
-            <a:off x="8546896" y="1673352"/>
-            <a:ext cx="146304" cy="146304"/>
-          </a:xfrm>
-          <a:prstGeom prst="triangle">
-            <a:avLst/>
-          </a:prstGeom>
-          <a:solidFill>
-            <a:srgbClr val="0D9488"/>
-          </a:solidFill>
-          <a:ln>
-            <a:noFill/>
-          </a:ln>
-          <a:effectLst/>
-        </p:spPr>
-        <p:style>
-          <a:lnRef idx="1">
-            <a:schemeClr val="accent1"/>
-          </a:lnRef>
-          <a:fillRef idx="3">
-            <a:schemeClr val="accent1"/>
-          </a:fillRef>
-          <a:effectRef idx="2">
-            <a:schemeClr val="accent1"/>
-          </a:effectRef>
-          <a:fontRef idx="minor">
-            <a:schemeClr val="lt1"/>
-          </a:fontRef>
-        </p:style>
-        <p:txBody>
-          <a:bodyPr rtlCol="0" anchor="ctr"/>
-          <a:lstStyle/>
-          <a:p>
-            <a:pPr algn="ctr"/>
-          </a:p>
-        </p:txBody>
-      </p:sp>
-      <p:sp>
-        <p:nvSpPr>
-          <p:cNvPr id="12" name="Oval 11"/>
-          <p:cNvSpPr/>
-          <p:nvPr/>
-        </p:nvSpPr>
-        <p:spPr>
-          <a:xfrm>
-            <a:off x="2040940" y="1481328"/>
-            <a:ext cx="530352" cy="530352"/>
-          </a:xfrm>
-          <a:prstGeom prst="ellipse">
-            <a:avLst/>
-          </a:prstGeom>
-          <a:solidFill>
-            <a:srgbClr val="0D9488"/>
-          </a:solidFill>
-          <a:ln>
-            <a:noFill/>
-          </a:ln>
-          <a:effectLst/>
-        </p:spPr>
-        <p:style>
-          <a:lnRef idx="1">
-            <a:schemeClr val="accent1"/>
-          </a:lnRef>
-          <a:fillRef idx="3">
-            <a:schemeClr val="accent1"/>
-          </a:fillRef>
-          <a:effectRef idx="2">
-            <a:schemeClr val="accent1"/>
-          </a:effectRef>
-          <a:fontRef idx="minor">
-            <a:schemeClr val="lt1"/>
-          </a:fontRef>
-        </p:style>
-        <p:txBody>
-          <a:bodyPr rtlCol="0" anchor="ctr"/>
-          <a:lstStyle/>
-          <a:p>
-            <a:pPr algn="ctr"/>
-          </a:p>
-        </p:txBody>
-      </p:sp>
-      <p:sp>
-        <p:nvSpPr>
-          <p:cNvPr id="13" name="TextBox 12"/>
+          <p:cNvPr id="10" name="TextBox 9"/>
           <p:cNvSpPr txBox="1"/>
           <p:nvPr/>
         </p:nvSpPr>
@@ -7707,7 +7575,7 @@
       </p:sp>
       <p:sp>
         <p:nvSpPr>
-          <p:cNvPr id="14" name="Rounded Rectangle 13"/>
+          <p:cNvPr id="11" name="Rounded Rectangle 10"/>
           <p:cNvSpPr/>
           <p:nvPr/>
         </p:nvSpPr>
@@ -7755,7 +7623,7 @@
       </p:sp>
       <p:sp>
         <p:nvSpPr>
-          <p:cNvPr id="15" name="TextBox 14"/>
+          <p:cNvPr id="12" name="TextBox 11"/>
           <p:cNvSpPr txBox="1"/>
           <p:nvPr/>
         </p:nvSpPr>
@@ -7790,7 +7658,7 @@
       </p:sp>
       <p:sp>
         <p:nvSpPr>
-          <p:cNvPr id="16" name="TextBox 15"/>
+          <p:cNvPr id="13" name="TextBox 12"/>
           <p:cNvSpPr txBox="1"/>
           <p:nvPr/>
         </p:nvSpPr>
@@ -7829,7 +7697,7 @@
       </p:sp>
       <p:sp>
         <p:nvSpPr>
-          <p:cNvPr id="17" name="Oval 16"/>
+          <p:cNvPr id="14" name="Oval 13"/>
           <p:cNvSpPr/>
           <p:nvPr/>
         </p:nvSpPr>
@@ -7873,7 +7741,7 @@
       </p:sp>
       <p:sp>
         <p:nvSpPr>
-          <p:cNvPr id="18" name="TextBox 17"/>
+          <p:cNvPr id="15" name="TextBox 14"/>
           <p:cNvSpPr txBox="1"/>
           <p:nvPr/>
         </p:nvSpPr>
@@ -7908,7 +7776,7 @@
       </p:sp>
       <p:sp>
         <p:nvSpPr>
-          <p:cNvPr id="19" name="Rounded Rectangle 18"/>
+          <p:cNvPr id="16" name="Rounded Rectangle 15"/>
           <p:cNvSpPr/>
           <p:nvPr/>
         </p:nvSpPr>
@@ -7956,7 +7824,7 @@
       </p:sp>
       <p:sp>
         <p:nvSpPr>
-          <p:cNvPr id="20" name="TextBox 19"/>
+          <p:cNvPr id="17" name="TextBox 16"/>
           <p:cNvSpPr txBox="1"/>
           <p:nvPr/>
         </p:nvSpPr>
@@ -7991,7 +7859,7 @@
       </p:sp>
       <p:sp>
         <p:nvSpPr>
-          <p:cNvPr id="21" name="TextBox 20"/>
+          <p:cNvPr id="18" name="TextBox 17"/>
           <p:cNvSpPr txBox="1"/>
           <p:nvPr/>
         </p:nvSpPr>
@@ -8030,7 +7898,7 @@
       </p:sp>
       <p:sp>
         <p:nvSpPr>
-          <p:cNvPr id="22" name="Oval 21"/>
+          <p:cNvPr id="19" name="Oval 18"/>
           <p:cNvSpPr/>
           <p:nvPr/>
         </p:nvSpPr>
@@ -8074,7 +7942,7 @@
       </p:sp>
       <p:sp>
         <p:nvSpPr>
-          <p:cNvPr id="23" name="TextBox 22"/>
+          <p:cNvPr id="20" name="TextBox 19"/>
           <p:cNvSpPr txBox="1"/>
           <p:nvPr/>
         </p:nvSpPr>
@@ -8109,7 +7977,7 @@
       </p:sp>
       <p:sp>
         <p:nvSpPr>
-          <p:cNvPr id="24" name="Rounded Rectangle 23"/>
+          <p:cNvPr id="21" name="Rounded Rectangle 20"/>
           <p:cNvSpPr/>
           <p:nvPr/>
         </p:nvSpPr>
@@ -8157,7 +8025,7 @@
       </p:sp>
       <p:sp>
         <p:nvSpPr>
-          <p:cNvPr id="25" name="TextBox 24"/>
+          <p:cNvPr id="22" name="TextBox 21"/>
           <p:cNvSpPr txBox="1"/>
           <p:nvPr/>
         </p:nvSpPr>
@@ -8192,7 +8060,7 @@
       </p:sp>
       <p:sp>
         <p:nvSpPr>
-          <p:cNvPr id="26" name="TextBox 25"/>
+          <p:cNvPr id="23" name="TextBox 22"/>
           <p:cNvSpPr txBox="1"/>
           <p:nvPr/>
         </p:nvSpPr>
@@ -8231,7 +8099,7 @@
       </p:sp>
       <p:sp>
         <p:nvSpPr>
-          <p:cNvPr id="27" name="Oval 26"/>
+          <p:cNvPr id="24" name="Oval 23"/>
           <p:cNvSpPr/>
           <p:nvPr/>
         </p:nvSpPr>
@@ -8275,7 +8143,7 @@
       </p:sp>
       <p:sp>
         <p:nvSpPr>
-          <p:cNvPr id="28" name="TextBox 27"/>
+          <p:cNvPr id="25" name="TextBox 24"/>
           <p:cNvSpPr txBox="1"/>
           <p:nvPr/>
         </p:nvSpPr>
@@ -8310,7 +8178,7 @@
       </p:sp>
       <p:sp>
         <p:nvSpPr>
-          <p:cNvPr id="29" name="Rounded Rectangle 28"/>
+          <p:cNvPr id="26" name="Rounded Rectangle 25"/>
           <p:cNvSpPr/>
           <p:nvPr/>
         </p:nvSpPr>
@@ -8358,7 +8226,7 @@
       </p:sp>
       <p:sp>
         <p:nvSpPr>
-          <p:cNvPr id="30" name="TextBox 29"/>
+          <p:cNvPr id="27" name="TextBox 26"/>
           <p:cNvSpPr txBox="1"/>
           <p:nvPr/>
         </p:nvSpPr>
@@ -8393,7 +8261,7 @@
       </p:sp>
       <p:sp>
         <p:nvSpPr>
-          <p:cNvPr id="31" name="TextBox 30"/>
+          <p:cNvPr id="28" name="TextBox 27"/>
           <p:cNvSpPr txBox="1"/>
           <p:nvPr/>
         </p:nvSpPr>
@@ -8432,7 +8300,7 @@
       </p:sp>
       <p:sp>
         <p:nvSpPr>
-          <p:cNvPr id="32" name="TextBox 31"/>
+          <p:cNvPr id="29" name="TextBox 28"/>
           <p:cNvSpPr txBox="1"/>
           <p:nvPr/>
         </p:nvSpPr>
@@ -8467,7 +8335,7 @@
       </p:sp>
       <p:sp>
         <p:nvSpPr>
-          <p:cNvPr id="33" name="TextBox 32"/>
+          <p:cNvPr id="30" name="TextBox 29"/>
           <p:cNvSpPr txBox="1"/>
           <p:nvPr/>
         </p:nvSpPr>
@@ -8502,7 +8370,7 @@
       </p:sp>
       <p:sp>
         <p:nvSpPr>
-          <p:cNvPr id="34" name="Rectangle 33"/>
+          <p:cNvPr id="31" name="Rectangle 30"/>
           <p:cNvSpPr/>
           <p:nvPr/>
         </p:nvSpPr>
@@ -9026,7 +8894,7 @@
           <a:p>
             <a:pPr>
               <a:lnSpc>
-                <a:spcPct val="115000"/>
+                <a:spcPct val="149500"/>
               </a:lnSpc>
             </a:pPr>
             <a:r>
@@ -9042,7 +8910,7 @@
           <a:p>
             <a:pPr>
               <a:lnSpc>
-                <a:spcPct val="115000"/>
+                <a:spcPct val="149500"/>
               </a:lnSpc>
             </a:pPr>
             <a:r>
@@ -9058,7 +8926,7 @@
           <a:p>
             <a:pPr>
               <a:lnSpc>
-                <a:spcPct val="115000"/>
+                <a:spcPct val="149500"/>
               </a:lnSpc>
             </a:pPr>
             <a:r>
@@ -9074,7 +8942,7 @@
           <a:p>
             <a:pPr>
               <a:lnSpc>
-                <a:spcPct val="115000"/>
+                <a:spcPct val="149500"/>
               </a:lnSpc>
             </a:pPr>
             <a:r>
@@ -9456,7 +9324,7 @@
           <a:p>
             <a:pPr>
               <a:lnSpc>
-                <a:spcPct val="115000"/>
+                <a:spcPct val="149500"/>
               </a:lnSpc>
             </a:pPr>
             <a:r>
@@ -9481,7 +9349,7 @@
           <a:p>
             <a:pPr>
               <a:lnSpc>
-                <a:spcPct val="115000"/>
+                <a:spcPct val="149500"/>
               </a:lnSpc>
             </a:pPr>
             <a:r>
@@ -9506,7 +9374,7 @@
           <a:p>
             <a:pPr>
               <a:lnSpc>
-                <a:spcPct val="115000"/>
+                <a:spcPct val="149500"/>
               </a:lnSpc>
             </a:pPr>
             <a:r>
@@ -10240,7 +10108,7 @@
           <a:p>
             <a:pPr>
               <a:lnSpc>
-                <a:spcPct val="115000"/>
+                <a:spcPct val="149500"/>
               </a:lnSpc>
             </a:pPr>
             <a:r>
@@ -10265,7 +10133,7 @@
           <a:p>
             <a:pPr>
               <a:lnSpc>
-                <a:spcPct val="115000"/>
+                <a:spcPct val="149500"/>
               </a:lnSpc>
             </a:pPr>
             <a:r>
@@ -10290,7 +10158,7 @@
           <a:p>
             <a:pPr>
               <a:lnSpc>
-                <a:spcPct val="115000"/>
+                <a:spcPct val="149500"/>
               </a:lnSpc>
             </a:pPr>
             <a:r>
@@ -10315,7 +10183,7 @@
           <a:p>
             <a:pPr>
               <a:lnSpc>
-                <a:spcPct val="115000"/>
+                <a:spcPct val="149500"/>
               </a:lnSpc>
             </a:pPr>
             <a:r>
@@ -10706,7 +10574,7 @@
           <a:p>
             <a:pPr>
               <a:lnSpc>
-                <a:spcPct val="115000"/>
+                <a:spcPct val="149500"/>
               </a:lnSpc>
             </a:pPr>
             <a:r>
@@ -10731,7 +10599,7 @@
           <a:p>
             <a:pPr>
               <a:lnSpc>
-                <a:spcPct val="115000"/>
+                <a:spcPct val="149500"/>
               </a:lnSpc>
             </a:pPr>
             <a:r>
@@ -10756,7 +10624,7 @@
           <a:p>
             <a:pPr>
               <a:lnSpc>
-                <a:spcPct val="115000"/>
+                <a:spcPct val="149500"/>
               </a:lnSpc>
             </a:pPr>
             <a:r>

--- a/class/cloud_infra_mgmt/01주차_클라우드개념_Docker입문/01_강의자료/3차시_Docker데몬심화와nginx실습.pptx
+++ b/class/cloud_infra_mgmt/01주차_클라우드개념_Docker입문/01_강의자료/3차시_Docker데몬심화와nginx실습.pptx
@@ -4983,6 +4983,8 @@
                   <a:srgbClr val="14B8A6"/>
                 </a:solidFill>
                 <a:latin typeface="맑은 고딕"/>
+                <a:ea typeface="맑은 고딕"/>
+                <a:cs typeface="맑은 고딕"/>
               </a:rPr>
               <a:t>클라우드인프라관리  ·  1주차 3차시</a:t>
             </a:r>
@@ -5018,6 +5020,8 @@
                   <a:srgbClr val="FFFFFF"/>
                 </a:solidFill>
                 <a:latin typeface="맑은 고딕"/>
+                <a:ea typeface="맑은 고딕"/>
+                <a:cs typeface="맑은 고딕"/>
               </a:rPr>
               <a:t>Docker 데몬 동작 원리와</a:t>
             </a:r>
@@ -5030,6 +5034,8 @@
                   <a:srgbClr val="FFFFFF"/>
                 </a:solidFill>
                 <a:latin typeface="맑은 고딕"/>
+                <a:ea typeface="맑은 고딕"/>
+                <a:cs typeface="맑은 고딕"/>
               </a:rPr>
               <a:t>nginx 컨테이너 실습 심화</a:t>
             </a:r>
@@ -5065,6 +5071,8 @@
                   <a:srgbClr val="C9D3E6"/>
                 </a:solidFill>
                 <a:latin typeface="맑은 고딕"/>
+                <a:ea typeface="맑은 고딕"/>
+                <a:cs typeface="맑은 고딕"/>
               </a:rPr>
               <a:t>컨테이너 = 격리된 프로세스 · docker inspect로 들여다보기</a:t>
             </a:r>
@@ -5100,6 +5108,8 @@
                   <a:srgbClr val="FFFFFF"/>
                 </a:solidFill>
                 <a:latin typeface="맑은 고딕"/>
+                <a:ea typeface="맑은 고딕"/>
+                <a:cs typeface="맑은 고딕"/>
               </a:rPr>
               <a:t>영남이공대학교 김지윤교수</a:t>
             </a:r>
@@ -5259,6 +5269,8 @@
                   <a:srgbClr val="14213D"/>
                 </a:solidFill>
                 <a:latin typeface="맑은 고딕"/>
+                <a:ea typeface="맑은 고딕"/>
+                <a:cs typeface="맑은 고딕"/>
               </a:rPr>
               <a:t>03</a:t>
             </a:r>
@@ -5294,6 +5306,8 @@
                   <a:srgbClr val="14B8A6"/>
                 </a:solidFill>
                 <a:latin typeface="맑은 고딕"/>
+                <a:ea typeface="맑은 고딕"/>
+                <a:cs typeface="맑은 고딕"/>
               </a:rPr>
               <a:t>실습 안내</a:t>
             </a:r>
@@ -5329,6 +5343,8 @@
                   <a:srgbClr val="FFFFFF"/>
                 </a:solidFill>
                 <a:latin typeface="맑은 고딕"/>
+                <a:ea typeface="맑은 고딕"/>
+                <a:cs typeface="맑은 고딕"/>
               </a:rPr>
               <a:t>Killercoda 실습</a:t>
             </a:r>
@@ -5368,6 +5384,8 @@
                   <a:srgbClr val="0D9488"/>
                 </a:solidFill>
                 <a:latin typeface="맑은 고딕"/>
+                <a:ea typeface="맑은 고딕"/>
+                <a:cs typeface="맑은 고딕"/>
               </a:rPr>
               <a:t>●  </a:t>
             </a:r>
@@ -5377,6 +5395,8 @@
                   <a:srgbClr val="222733"/>
                 </a:solidFill>
                 <a:latin typeface="맑은 고딕"/>
+                <a:ea typeface="맑은 고딕"/>
+                <a:cs typeface="맑은 고딕"/>
               </a:rPr>
               <a:t>docker run -d --name web nginx</a:t>
             </a:r>
@@ -5393,6 +5413,8 @@
                   <a:srgbClr val="0D9488"/>
                 </a:solidFill>
                 <a:latin typeface="맑은 고딕"/>
+                <a:ea typeface="맑은 고딕"/>
+                <a:cs typeface="맑은 고딕"/>
               </a:rPr>
               <a:t>●  </a:t>
             </a:r>
@@ -5402,6 +5424,8 @@
                   <a:srgbClr val="222733"/>
                 </a:solidFill>
                 <a:latin typeface="맑은 고딕"/>
+                <a:ea typeface="맑은 고딕"/>
+                <a:cs typeface="맑은 고딕"/>
               </a:rPr>
               <a:t>docker ps  — web 컨테이너가 Up 상태인지 확인</a:t>
             </a:r>
@@ -5418,6 +5442,8 @@
                   <a:srgbClr val="0D9488"/>
                 </a:solidFill>
                 <a:latin typeface="맑은 고딕"/>
+                <a:ea typeface="맑은 고딕"/>
+                <a:cs typeface="맑은 고딕"/>
               </a:rPr>
               <a:t>●  </a:t>
             </a:r>
@@ -5427,6 +5453,8 @@
                   <a:srgbClr val="222733"/>
                 </a:solidFill>
                 <a:latin typeface="맑은 고딕"/>
+                <a:ea typeface="맑은 고딕"/>
+                <a:cs typeface="맑은 고딕"/>
               </a:rPr>
               <a:t>docker inspect web | grep IPAddress  — 할당된 IP 확인</a:t>
             </a:r>
@@ -5443,6 +5471,8 @@
                   <a:srgbClr val="DC2626"/>
                 </a:solidFill>
                 <a:latin typeface="맑은 고딕"/>
+                <a:ea typeface="맑은 고딕"/>
+                <a:cs typeface="맑은 고딕"/>
               </a:rPr>
               <a:t>●  </a:t>
             </a:r>
@@ -5452,6 +5482,8 @@
                   <a:srgbClr val="222733"/>
                 </a:solidFill>
                 <a:latin typeface="맑은 고딕"/>
+                <a:ea typeface="맑은 고딕"/>
+                <a:cs typeface="맑은 고딕"/>
               </a:rPr>
               <a:t>Killercoda 60분 제한 — 초기화돼도 VM에서 이어가면 OK</a:t>
             </a:r>
@@ -5487,6 +5519,8 @@
                   <a:srgbClr val="5B6373"/>
                 </a:solidFill>
                 <a:latin typeface="맑은 고딕"/>
+                <a:ea typeface="맑은 고딕"/>
+                <a:cs typeface="맑은 고딕"/>
               </a:rPr>
               <a:t>클라우드인프라관리  ·  1주차 3차시</a:t>
             </a:r>
@@ -5522,6 +5556,8 @@
                   <a:srgbClr val="5B6373"/>
                 </a:solidFill>
                 <a:latin typeface="맑은 고딕"/>
+                <a:ea typeface="맑은 고딕"/>
+                <a:cs typeface="맑은 고딕"/>
               </a:rPr>
               <a:t>10 / 13</a:t>
             </a:r>
@@ -5725,6 +5761,8 @@
                   <a:srgbClr val="14213D"/>
                 </a:solidFill>
                 <a:latin typeface="맑은 고딕"/>
+                <a:ea typeface="맑은 고딕"/>
+                <a:cs typeface="맑은 고딕"/>
               </a:rPr>
               <a:t>03</a:t>
             </a:r>
@@ -5760,6 +5798,8 @@
                   <a:srgbClr val="14B8A6"/>
                 </a:solidFill>
                 <a:latin typeface="맑은 고딕"/>
+                <a:ea typeface="맑은 고딕"/>
+                <a:cs typeface="맑은 고딕"/>
               </a:rPr>
               <a:t>실습 안내</a:t>
             </a:r>
@@ -5795,6 +5835,8 @@
                   <a:srgbClr val="FFFFFF"/>
                 </a:solidFill>
                 <a:latin typeface="맑은 고딕"/>
+                <a:ea typeface="맑은 고딕"/>
+                <a:cs typeface="맑은 고딕"/>
               </a:rPr>
               <a:t>VM 과제 — 동일 실습 + 제출</a:t>
             </a:r>
@@ -5834,6 +5876,8 @@
                   <a:srgbClr val="0D9488"/>
                 </a:solidFill>
                 <a:latin typeface="맑은 고딕"/>
+                <a:ea typeface="맑은 고딕"/>
+                <a:cs typeface="맑은 고딕"/>
               </a:rPr>
               <a:t>●  </a:t>
             </a:r>
@@ -5843,6 +5887,8 @@
                   <a:srgbClr val="222733"/>
                 </a:solidFill>
                 <a:latin typeface="맑은 고딕"/>
+                <a:ea typeface="맑은 고딕"/>
+                <a:cs typeface="맑은 고딕"/>
               </a:rPr>
               <a:t>개인 VM(cloud-lab)에 로그인</a:t>
             </a:r>
@@ -5859,6 +5905,8 @@
                   <a:srgbClr val="0D9488"/>
                 </a:solidFill>
                 <a:latin typeface="맑은 고딕"/>
+                <a:ea typeface="맑은 고딕"/>
+                <a:cs typeface="맑은 고딕"/>
               </a:rPr>
               <a:t>●  </a:t>
             </a:r>
@@ -5868,6 +5916,8 @@
                   <a:srgbClr val="222733"/>
                 </a:solidFill>
                 <a:latin typeface="맑은 고딕"/>
+                <a:ea typeface="맑은 고딕"/>
+                <a:cs typeface="맑은 고딕"/>
               </a:rPr>
               <a:t>docker run -d --name web nginx / docker ps / docker inspect web | grep IPAddress</a:t>
             </a:r>
@@ -5884,6 +5934,8 @@
                   <a:srgbClr val="0D9488"/>
                 </a:solidFill>
                 <a:latin typeface="맑은 고딕"/>
+                <a:ea typeface="맑은 고딕"/>
+                <a:cs typeface="맑은 고딕"/>
               </a:rPr>
               <a:t>●  </a:t>
             </a:r>
@@ -5893,6 +5945,8 @@
                   <a:srgbClr val="222733"/>
                 </a:solidFill>
                 <a:latin typeface="맑은 고딕"/>
+                <a:ea typeface="맑은 고딕"/>
+                <a:cs typeface="맑은 고딕"/>
               </a:rPr>
               <a:t>Killercoda와 VM에서 나온 IP가 다른 이유를 생각해보기 (서로 다른 격리 환경)</a:t>
             </a:r>
@@ -5909,6 +5963,8 @@
                   <a:srgbClr val="0D9488"/>
                 </a:solidFill>
                 <a:latin typeface="맑은 고딕"/>
+                <a:ea typeface="맑은 고딕"/>
+                <a:cs typeface="맑은 고딕"/>
               </a:rPr>
               <a:t>●  </a:t>
             </a:r>
@@ -5918,6 +5974,8 @@
                   <a:srgbClr val="222733"/>
                 </a:solidFill>
                 <a:latin typeface="맑은 고딕"/>
+                <a:ea typeface="맑은 고딕"/>
+                <a:cs typeface="맑은 고딕"/>
               </a:rPr>
               <a:t>실행 결과 캡처 또는 GitHub 링크를 LMS 과제 게시판에 제출</a:t>
             </a:r>
@@ -5953,6 +6011,8 @@
                   <a:srgbClr val="5B6373"/>
                 </a:solidFill>
                 <a:latin typeface="맑은 고딕"/>
+                <a:ea typeface="맑은 고딕"/>
+                <a:cs typeface="맑은 고딕"/>
               </a:rPr>
               <a:t>클라우드인프라관리  ·  1주차 3차시</a:t>
             </a:r>
@@ -5988,6 +6048,8 @@
                   <a:srgbClr val="5B6373"/>
                 </a:solidFill>
                 <a:latin typeface="맑은 고딕"/>
+                <a:ea typeface="맑은 고딕"/>
+                <a:cs typeface="맑은 고딕"/>
               </a:rPr>
               <a:t>11 / 13</a:t>
             </a:r>
@@ -6173,6 +6235,8 @@
                   <a:srgbClr val="FFFFFF"/>
                 </a:solidFill>
                 <a:latin typeface="맑은 고딕"/>
+                <a:ea typeface="맑은 고딕"/>
+                <a:cs typeface="맑은 고딕"/>
               </a:rPr>
               <a:t>오늘의 정리</a:t>
             </a:r>
@@ -6226,6 +6290,8 @@
                   <a:srgbClr val="14213D"/>
                 </a:solidFill>
                 <a:latin typeface="맑은 고딕"/>
+                <a:ea typeface="맑은 고딕"/>
+                <a:cs typeface="맑은 고딕"/>
               </a:rPr>
               <a:t>1</a:t>
             </a:r>
@@ -6261,6 +6327,8 @@
                   <a:srgbClr val="FFFFFF"/>
                 </a:solidFill>
                 <a:latin typeface="맑은 고딕"/>
+                <a:ea typeface="맑은 고딕"/>
+                <a:cs typeface="맑은 고딕"/>
               </a:rPr>
               <a:t>컨테이너 = 격리된 일반 프로세스</a:t>
             </a:r>
@@ -6314,6 +6382,8 @@
                   <a:srgbClr val="14213D"/>
                 </a:solidFill>
                 <a:latin typeface="맑은 고딕"/>
+                <a:ea typeface="맑은 고딕"/>
+                <a:cs typeface="맑은 고딕"/>
               </a:rPr>
               <a:t>2</a:t>
             </a:r>
@@ -6349,6 +6419,8 @@
                   <a:srgbClr val="FFFFFF"/>
                 </a:solidFill>
                 <a:latin typeface="맑은 고딕"/>
+                <a:ea typeface="맑은 고딕"/>
+                <a:cs typeface="맑은 고딕"/>
               </a:rPr>
               <a:t>docker inspect = 컨테이너 내부 상태를 들여다보는 창</a:t>
             </a:r>
@@ -6490,6 +6562,8 @@
                   <a:srgbClr val="FFFFFF"/>
                 </a:solidFill>
                 <a:latin typeface="맑은 고딕"/>
+                <a:ea typeface="맑은 고딕"/>
+                <a:cs typeface="맑은 고딕"/>
               </a:rPr>
               <a:t>다음 주 예고</a:t>
             </a:r>
@@ -6525,6 +6599,8 @@
                   <a:srgbClr val="14B8A6"/>
                 </a:solidFill>
                 <a:latin typeface="맑은 고딕"/>
+                <a:ea typeface="맑은 고딕"/>
+                <a:cs typeface="맑은 고딕"/>
               </a:rPr>
               <a:t>다음 차시 예고 — 2주차 — Docker 컨테이너 생명주기와 데이터 보존</a:t>
             </a:r>
@@ -6560,6 +6636,8 @@
                   <a:srgbClr val="FFFFFF"/>
                 </a:solidFill>
                 <a:latin typeface="맑은 고딕"/>
+                <a:ea typeface="맑은 고딕"/>
+                <a:cs typeface="맑은 고딕"/>
               </a:rPr>
               <a:t>컨테이너 명령어(run/ps/stop/rm)를 더 깊이 다루고, 볼륨(Volume)으로 컨테이너 데이터를 VM에 영구 저장하는 방법을 배웁니다.</a:t>
             </a:r>
@@ -6745,6 +6823,8 @@
                   <a:srgbClr val="14B8A6"/>
                 </a:solidFill>
                 <a:latin typeface="맑은 고딕"/>
+                <a:ea typeface="맑은 고딕"/>
+                <a:cs typeface="맑은 고딕"/>
               </a:rPr>
               <a:t>1주차를 마치며</a:t>
             </a:r>
@@ -6780,6 +6860,8 @@
                   <a:srgbClr val="FFFFFF"/>
                 </a:solidFill>
                 <a:latin typeface="맑은 고딕"/>
+                <a:ea typeface="맑은 고딕"/>
+                <a:cs typeface="맑은 고딕"/>
               </a:rPr>
               <a:t>수고하셨습니다!</a:t>
             </a:r>
@@ -6819,6 +6901,8 @@
                   <a:srgbClr val="C9D3E6"/>
                 </a:solidFill>
                 <a:latin typeface="맑은 고딕"/>
+                <a:ea typeface="맑은 고딕"/>
+                <a:cs typeface="맑은 고딕"/>
               </a:rPr>
               <a:t>클라우드·가상화 개념부터 Docker의 기본 동작 원리까지, 이 과목의 첫걸음을 잘 떼셨습니다. 다음 주에도 함께해요.</a:t>
             </a:r>
@@ -6960,6 +7044,8 @@
                   <a:srgbClr val="14B8A6"/>
                 </a:solidFill>
                 <a:latin typeface="맑은 고딕"/>
+                <a:ea typeface="맑은 고딕"/>
+                <a:cs typeface="맑은 고딕"/>
               </a:rPr>
               <a:t>SESSION OVERVIEW</a:t>
             </a:r>
@@ -6995,6 +7081,8 @@
                   <a:srgbClr val="FFFFFF"/>
                 </a:solidFill>
                 <a:latin typeface="맑은 고딕"/>
+                <a:ea typeface="맑은 고딕"/>
+                <a:cs typeface="맑은 고딕"/>
               </a:rPr>
               <a:t>오늘의 학습 목표</a:t>
             </a:r>
@@ -7034,6 +7122,8 @@
                   <a:srgbClr val="222733"/>
                 </a:solidFill>
                 <a:latin typeface="맑은 고딕"/>
+                <a:ea typeface="맑은 고딕"/>
+                <a:cs typeface="맑은 고딕"/>
               </a:rPr>
               <a:t>1.  Docker 데몬이 이미지 실행 요청을 어떻게 처리하는지 이해한다</a:t>
             </a:r>
@@ -7050,6 +7140,8 @@
                   <a:srgbClr val="222733"/>
                 </a:solidFill>
                 <a:latin typeface="맑은 고딕"/>
+                <a:ea typeface="맑은 고딕"/>
+                <a:cs typeface="맑은 고딕"/>
               </a:rPr>
               <a:t>2.  컨테이너가 결국 '격리된 프로세스'라는 것을 이해한다</a:t>
             </a:r>
@@ -7066,6 +7158,8 @@
                   <a:srgbClr val="222733"/>
                 </a:solidFill>
                 <a:latin typeface="맑은 고딕"/>
+                <a:ea typeface="맑은 고딕"/>
+                <a:cs typeface="맑은 고딕"/>
               </a:rPr>
               <a:t>3.  nginx 컨테이너를 실행하고 docker inspect로 내부를 점검한다</a:t>
             </a:r>
@@ -7101,6 +7195,8 @@
                   <a:srgbClr val="5B6373"/>
                 </a:solidFill>
                 <a:latin typeface="맑은 고딕"/>
+                <a:ea typeface="맑은 고딕"/>
+                <a:cs typeface="맑은 고딕"/>
               </a:rPr>
               <a:t>클라우드인프라관리  ·  1주차 3차시</a:t>
             </a:r>
@@ -7136,6 +7232,8 @@
                   <a:srgbClr val="5B6373"/>
                 </a:solidFill>
                 <a:latin typeface="맑은 고딕"/>
+                <a:ea typeface="맑은 고딕"/>
+                <a:cs typeface="맑은 고딕"/>
               </a:rPr>
               <a:t>02 / 13</a:t>
             </a:r>
@@ -7321,6 +7419,8 @@
                   <a:srgbClr val="14B8A6"/>
                 </a:solidFill>
                 <a:latin typeface="맑은 고딕"/>
+                <a:ea typeface="맑은 고딕"/>
+                <a:cs typeface="맑은 고딕"/>
               </a:rPr>
               <a:t>SESSION OVERVIEW</a:t>
             </a:r>
@@ -7356,6 +7456,8 @@
                   <a:srgbClr val="FFFFFF"/>
                 </a:solidFill>
                 <a:latin typeface="맑은 고딕"/>
+                <a:ea typeface="맑은 고딕"/>
+                <a:cs typeface="맑은 고딕"/>
               </a:rPr>
               <a:t>오늘의 진행 순서</a:t>
             </a:r>
@@ -7567,6 +7669,8 @@
                   <a:srgbClr val="FFFFFF"/>
                 </a:solidFill>
                 <a:latin typeface="맑은 고딕"/>
+                <a:ea typeface="맑은 고딕"/>
+                <a:cs typeface="맑은 고딕"/>
               </a:rPr>
               <a:t>1</a:t>
             </a:r>
@@ -7650,6 +7754,8 @@
                   <a:srgbClr val="14213D"/>
                 </a:solidFill>
                 <a:latin typeface="맑은 고딕"/>
+                <a:ea typeface="맑은 고딕"/>
+                <a:cs typeface="맑은 고딕"/>
               </a:rPr>
               <a:t>개념 설명</a:t>
             </a:r>
@@ -7689,6 +7795,8 @@
                   <a:srgbClr val="222733"/>
                 </a:solidFill>
                 <a:latin typeface="맑은 고딕"/>
+                <a:ea typeface="맑은 고딕"/>
+                <a:cs typeface="맑은 고딕"/>
               </a:rPr>
               <a:t>강의자료 기반 직접 강의</a:t>
             </a:r>
@@ -7768,6 +7876,8 @@
                   <a:srgbClr val="FFFFFF"/>
                 </a:solidFill>
                 <a:latin typeface="맑은 고딕"/>
+                <a:ea typeface="맑은 고딕"/>
+                <a:cs typeface="맑은 고딕"/>
               </a:rPr>
               <a:t>2</a:t>
             </a:r>
@@ -7851,6 +7961,8 @@
                   <a:srgbClr val="14213D"/>
                 </a:solidFill>
                 <a:latin typeface="맑은 고딕"/>
+                <a:ea typeface="맑은 고딕"/>
+                <a:cs typeface="맑은 고딕"/>
               </a:rPr>
               <a:t>Killercoda</a:t>
             </a:r>
@@ -7890,6 +8002,8 @@
                   <a:srgbClr val="222733"/>
                 </a:solidFill>
                 <a:latin typeface="맑은 고딕"/>
+                <a:ea typeface="맑은 고딕"/>
+                <a:cs typeface="맑은 고딕"/>
               </a:rPr>
               <a:t>nginx 실행·inspect 실습</a:t>
             </a:r>
@@ -7969,6 +8083,8 @@
                   <a:srgbClr val="FFFFFF"/>
                 </a:solidFill>
                 <a:latin typeface="맑은 고딕"/>
+                <a:ea typeface="맑은 고딕"/>
+                <a:cs typeface="맑은 고딕"/>
               </a:rPr>
               <a:t>3</a:t>
             </a:r>
@@ -8052,6 +8168,8 @@
                   <a:srgbClr val="14213D"/>
                 </a:solidFill>
                 <a:latin typeface="맑은 고딕"/>
+                <a:ea typeface="맑은 고딕"/>
+                <a:cs typeface="맑은 고딕"/>
               </a:rPr>
               <a:t>VM 안내</a:t>
             </a:r>
@@ -8091,6 +8209,8 @@
                   <a:srgbClr val="222733"/>
                 </a:solidFill>
                 <a:latin typeface="맑은 고딕"/>
+                <a:ea typeface="맑은 고딕"/>
+                <a:cs typeface="맑은 고딕"/>
               </a:rPr>
               <a:t>VM에서 동일 실습 수행</a:t>
             </a:r>
@@ -8170,6 +8290,8 @@
                   <a:srgbClr val="FFFFFF"/>
                 </a:solidFill>
                 <a:latin typeface="맑은 고딕"/>
+                <a:ea typeface="맑은 고딕"/>
+                <a:cs typeface="맑은 고딕"/>
               </a:rPr>
               <a:t>4</a:t>
             </a:r>
@@ -8253,6 +8375,8 @@
                   <a:srgbClr val="14213D"/>
                 </a:solidFill>
                 <a:latin typeface="맑은 고딕"/>
+                <a:ea typeface="맑은 고딕"/>
+                <a:cs typeface="맑은 고딕"/>
               </a:rPr>
               <a:t>결과 제출</a:t>
             </a:r>
@@ -8292,6 +8416,8 @@
                   <a:srgbClr val="222733"/>
                 </a:solidFill>
                 <a:latin typeface="맑은 고딕"/>
+                <a:ea typeface="맑은 고딕"/>
+                <a:cs typeface="맑은 고딕"/>
               </a:rPr>
               <a:t>체크리스트 제출</a:t>
             </a:r>
@@ -8327,6 +8453,8 @@
                   <a:srgbClr val="5B6373"/>
                 </a:solidFill>
                 <a:latin typeface="맑은 고딕"/>
+                <a:ea typeface="맑은 고딕"/>
+                <a:cs typeface="맑은 고딕"/>
               </a:rPr>
               <a:t>클라우드인프라관리  ·  1주차 3차시</a:t>
             </a:r>
@@ -8362,6 +8490,8 @@
                   <a:srgbClr val="5B6373"/>
                 </a:solidFill>
                 <a:latin typeface="맑은 고딕"/>
+                <a:ea typeface="맑은 고딕"/>
+                <a:cs typeface="맑은 고딕"/>
               </a:rPr>
               <a:t>03 / 13</a:t>
             </a:r>
@@ -8565,6 +8695,8 @@
                   <a:srgbClr val="14213D"/>
                 </a:solidFill>
                 <a:latin typeface="맑은 고딕"/>
+                <a:ea typeface="맑은 고딕"/>
+                <a:cs typeface="맑은 고딕"/>
               </a:rPr>
               <a:t>PART 01</a:t>
             </a:r>
@@ -8600,6 +8732,8 @@
                   <a:srgbClr val="FFFFFF"/>
                 </a:solidFill>
                 <a:latin typeface="맑은 고딕"/>
+                <a:ea typeface="맑은 고딕"/>
+                <a:cs typeface="맑은 고딕"/>
               </a:rPr>
               <a:t>Docker 데몬은 실제로 무엇을 하는가</a:t>
             </a:r>
@@ -8635,6 +8769,8 @@
                   <a:srgbClr val="C9D3E6"/>
                 </a:solidFill>
                 <a:latin typeface="맑은 고딕"/>
+                <a:ea typeface="맑은 고딕"/>
+                <a:cs typeface="맑은 고딕"/>
               </a:rPr>
               <a:t>컨테이너 = 격리된 프로세스</a:t>
             </a:r>
@@ -8794,6 +8930,8 @@
                   <a:srgbClr val="14213D"/>
                 </a:solidFill>
                 <a:latin typeface="맑은 고딕"/>
+                <a:ea typeface="맑은 고딕"/>
+                <a:cs typeface="맑은 고딕"/>
               </a:rPr>
               <a:t>01</a:t>
             </a:r>
@@ -8829,6 +8967,8 @@
                   <a:srgbClr val="14B8A6"/>
                 </a:solidFill>
                 <a:latin typeface="맑은 고딕"/>
+                <a:ea typeface="맑은 고딕"/>
+                <a:cs typeface="맑은 고딕"/>
               </a:rPr>
               <a:t>PART 1 · Docker 데몬의 동작</a:t>
             </a:r>
@@ -8864,6 +9004,8 @@
                   <a:srgbClr val="FFFFFF"/>
                 </a:solidFill>
                 <a:latin typeface="맑은 고딕"/>
+                <a:ea typeface="맑은 고딕"/>
+                <a:cs typeface="맑은 고딕"/>
               </a:rPr>
               <a:t>docker run 실행 시 벌어지는 일</a:t>
             </a:r>
@@ -8903,6 +9045,8 @@
                   <a:srgbClr val="222733"/>
                 </a:solidFill>
                 <a:latin typeface="맑은 고딕"/>
+                <a:ea typeface="맑은 고딕"/>
+                <a:cs typeface="맑은 고딕"/>
               </a:rPr>
               <a:t>① 이미지가 로컬에 있는지 확인 (없으면 Registry에서 pull)</a:t>
             </a:r>
@@ -8919,6 +9063,8 @@
                   <a:srgbClr val="222733"/>
                 </a:solidFill>
                 <a:latin typeface="맑은 고딕"/>
+                <a:ea typeface="맑은 고딕"/>
+                <a:cs typeface="맑은 고딕"/>
               </a:rPr>
               <a:t>② 이미지로부터 컨테이너용 파일시스템 준비</a:t>
             </a:r>
@@ -8935,6 +9081,8 @@
                   <a:srgbClr val="222733"/>
                 </a:solidFill>
                 <a:latin typeface="맑은 고딕"/>
+                <a:ea typeface="맑은 고딕"/>
+                <a:cs typeface="맑은 고딕"/>
               </a:rPr>
               <a:t>③ 격리된 실행 공간(네임스페이스) 생성</a:t>
             </a:r>
@@ -8951,6 +9099,8 @@
                   <a:srgbClr val="222733"/>
                 </a:solidFill>
                 <a:latin typeface="맑은 고딕"/>
+                <a:ea typeface="맑은 고딕"/>
+                <a:cs typeface="맑은 고딕"/>
               </a:rPr>
               <a:t>④ 그 공간 안에서 지정된 프로세스(예: nginx) 실행</a:t>
             </a:r>
@@ -8986,6 +9136,8 @@
                   <a:srgbClr val="5B6373"/>
                 </a:solidFill>
                 <a:latin typeface="맑은 고딕"/>
+                <a:ea typeface="맑은 고딕"/>
+                <a:cs typeface="맑은 고딕"/>
               </a:rPr>
               <a:t>클라우드인프라관리  ·  1주차 3차시</a:t>
             </a:r>
@@ -9021,6 +9173,8 @@
                   <a:srgbClr val="5B6373"/>
                 </a:solidFill>
                 <a:latin typeface="맑은 고딕"/>
+                <a:ea typeface="맑은 고딕"/>
+                <a:cs typeface="맑은 고딕"/>
               </a:rPr>
               <a:t>05 / 13</a:t>
             </a:r>
@@ -9224,6 +9378,8 @@
                   <a:srgbClr val="14213D"/>
                 </a:solidFill>
                 <a:latin typeface="맑은 고딕"/>
+                <a:ea typeface="맑은 고딕"/>
+                <a:cs typeface="맑은 고딕"/>
               </a:rPr>
               <a:t>01</a:t>
             </a:r>
@@ -9259,6 +9415,8 @@
                   <a:srgbClr val="14B8A6"/>
                 </a:solidFill>
                 <a:latin typeface="맑은 고딕"/>
+                <a:ea typeface="맑은 고딕"/>
+                <a:cs typeface="맑은 고딕"/>
               </a:rPr>
               <a:t>PART 1 · Docker 데몬의 동작</a:t>
             </a:r>
@@ -9294,6 +9452,8 @@
                   <a:srgbClr val="FFFFFF"/>
                 </a:solidFill>
                 <a:latin typeface="맑은 고딕"/>
+                <a:ea typeface="맑은 고딕"/>
+                <a:cs typeface="맑은 고딕"/>
               </a:rPr>
               <a:t>컨테이너 = '격리된' 일반 프로세스</a:t>
             </a:r>
@@ -9333,6 +9493,8 @@
                   <a:srgbClr val="0D9488"/>
                 </a:solidFill>
                 <a:latin typeface="맑은 고딕"/>
+                <a:ea typeface="맑은 고딕"/>
+                <a:cs typeface="맑은 고딕"/>
               </a:rPr>
               <a:t>●  </a:t>
             </a:r>
@@ -9342,6 +9504,8 @@
                   <a:srgbClr val="222733"/>
                 </a:solidFill>
                 <a:latin typeface="맑은 고딕"/>
+                <a:ea typeface="맑은 고딕"/>
+                <a:cs typeface="맑은 고딕"/>
               </a:rPr>
               <a:t>컨테이너는 특별한 게 아니라, 호스트 OS 위에서 돌아가는 일반 프로세스</a:t>
             </a:r>
@@ -9358,6 +9522,8 @@
                   <a:srgbClr val="0D9488"/>
                 </a:solidFill>
                 <a:latin typeface="맑은 고딕"/>
+                <a:ea typeface="맑은 고딕"/>
+                <a:cs typeface="맑은 고딕"/>
               </a:rPr>
               <a:t>●  </a:t>
             </a:r>
@@ -9367,6 +9533,8 @@
                   <a:srgbClr val="222733"/>
                 </a:solidFill>
                 <a:latin typeface="맑은 고딕"/>
+                <a:ea typeface="맑은 고딕"/>
+                <a:cs typeface="맑은 고딕"/>
               </a:rPr>
               <a:t>다만 자기만의 파일시스템 · 네트워크 · 프로세스 목록을 '보게' 격리되어 있음</a:t>
             </a:r>
@@ -9383,6 +9551,8 @@
                   <a:srgbClr val="0D9488"/>
                 </a:solidFill>
                 <a:latin typeface="맑은 고딕"/>
+                <a:ea typeface="맑은 고딕"/>
+                <a:cs typeface="맑은 고딕"/>
               </a:rPr>
               <a:t>●  </a:t>
             </a:r>
@@ -9392,6 +9562,8 @@
                   <a:srgbClr val="222733"/>
                 </a:solidFill>
                 <a:latin typeface="맑은 고딕"/>
+                <a:ea typeface="맑은 고딕"/>
+                <a:cs typeface="맑은 고딕"/>
               </a:rPr>
               <a:t>그래서 컨테이너 안에서 ps를 치면 그 컨테이너의 프로세스만 보임</a:t>
             </a:r>
@@ -9471,6 +9643,8 @@
                   <a:srgbClr val="FFFFFF"/>
                 </a:solidFill>
                 <a:latin typeface="맑은 고딕"/>
+                <a:ea typeface="맑은 고딕"/>
+                <a:cs typeface="맑은 고딕"/>
               </a:rPr>
               <a:t>💡  핵심 한 줄</a:t>
             </a:r>
@@ -9506,6 +9680,8 @@
                   <a:srgbClr val="FFFFFF"/>
                 </a:solidFill>
                 <a:latin typeface="맑은 고딕"/>
+                <a:ea typeface="맑은 고딕"/>
+                <a:cs typeface="맑은 고딕"/>
               </a:rPr>
               <a:t>컨테이너를 지우는 것 = 그 격리된 프로세스를 종료하는 것 (VM처럼 별도 OS를 끄는 게 아님)</a:t>
             </a:r>
@@ -9541,6 +9717,8 @@
                   <a:srgbClr val="5B6373"/>
                 </a:solidFill>
                 <a:latin typeface="맑은 고딕"/>
+                <a:ea typeface="맑은 고딕"/>
+                <a:cs typeface="맑은 고딕"/>
               </a:rPr>
               <a:t>클라우드인프라관리  ·  1주차 3차시</a:t>
             </a:r>
@@ -9576,6 +9754,8 @@
                   <a:srgbClr val="5B6373"/>
                 </a:solidFill>
                 <a:latin typeface="맑은 고딕"/>
+                <a:ea typeface="맑은 고딕"/>
+                <a:cs typeface="맑은 고딕"/>
               </a:rPr>
               <a:t>06 / 13</a:t>
             </a:r>
@@ -9779,6 +9959,8 @@
                   <a:srgbClr val="14213D"/>
                 </a:solidFill>
                 <a:latin typeface="맑은 고딕"/>
+                <a:ea typeface="맑은 고딕"/>
+                <a:cs typeface="맑은 고딕"/>
               </a:rPr>
               <a:t>PART 02</a:t>
             </a:r>
@@ -9814,6 +9996,8 @@
                   <a:srgbClr val="FFFFFF"/>
                 </a:solidFill>
                 <a:latin typeface="맑은 고딕"/>
+                <a:ea typeface="맑은 고딕"/>
+                <a:cs typeface="맑은 고딕"/>
               </a:rPr>
               <a:t>nginx 컨테이너 실습 심화</a:t>
             </a:r>
@@ -9849,6 +10033,8 @@
                   <a:srgbClr val="C9D3E6"/>
                 </a:solidFill>
                 <a:latin typeface="맑은 고딕"/>
+                <a:ea typeface="맑은 고딕"/>
+                <a:cs typeface="맑은 고딕"/>
               </a:rPr>
               <a:t>docker inspect로 들여다보기</a:t>
             </a:r>
@@ -10008,6 +10194,8 @@
                   <a:srgbClr val="14213D"/>
                 </a:solidFill>
                 <a:latin typeface="맑은 고딕"/>
+                <a:ea typeface="맑은 고딕"/>
+                <a:cs typeface="맑은 고딕"/>
               </a:rPr>
               <a:t>02</a:t>
             </a:r>
@@ -10043,6 +10231,8 @@
                   <a:srgbClr val="14B8A6"/>
                 </a:solidFill>
                 <a:latin typeface="맑은 고딕"/>
+                <a:ea typeface="맑은 고딕"/>
+                <a:cs typeface="맑은 고딕"/>
               </a:rPr>
               <a:t>PART 2 · nginx 실습 심화</a:t>
             </a:r>
@@ -10078,6 +10268,8 @@
                   <a:srgbClr val="FFFFFF"/>
                 </a:solidFill>
                 <a:latin typeface="맑은 고딕"/>
+                <a:ea typeface="맑은 고딕"/>
+                <a:cs typeface="맑은 고딕"/>
               </a:rPr>
               <a:t>오늘 실행할 명령어 미리보기</a:t>
             </a:r>
@@ -10117,6 +10309,8 @@
                   <a:srgbClr val="0D9488"/>
                 </a:solidFill>
                 <a:latin typeface="맑은 고딕"/>
+                <a:ea typeface="맑은 고딕"/>
+                <a:cs typeface="맑은 고딕"/>
               </a:rPr>
               <a:t>●  </a:t>
             </a:r>
@@ -10126,6 +10320,8 @@
                   <a:srgbClr val="222733"/>
                 </a:solidFill>
                 <a:latin typeface="맑은 고딕"/>
+                <a:ea typeface="맑은 고딕"/>
+                <a:cs typeface="맑은 고딕"/>
               </a:rPr>
               <a:t>docker run -d --name web nginx  — 백그라운드(-d)로, 이름을 지정(--name)해서 실행</a:t>
             </a:r>
@@ -10142,6 +10338,8 @@
                   <a:srgbClr val="0D9488"/>
                 </a:solidFill>
                 <a:latin typeface="맑은 고딕"/>
+                <a:ea typeface="맑은 고딕"/>
+                <a:cs typeface="맑은 고딕"/>
               </a:rPr>
               <a:t>●  </a:t>
             </a:r>
@@ -10151,6 +10349,8 @@
                   <a:srgbClr val="222733"/>
                 </a:solidFill>
                 <a:latin typeface="맑은 고딕"/>
+                <a:ea typeface="맑은 고딕"/>
+                <a:cs typeface="맑은 고딕"/>
               </a:rPr>
               <a:t>docker ps  — 실행 중인 컨테이너 목록 확인</a:t>
             </a:r>
@@ -10167,6 +10367,8 @@
                   <a:srgbClr val="0D9488"/>
                 </a:solidFill>
                 <a:latin typeface="맑은 고딕"/>
+                <a:ea typeface="맑은 고딕"/>
+                <a:cs typeface="맑은 고딕"/>
               </a:rPr>
               <a:t>●  </a:t>
             </a:r>
@@ -10176,6 +10378,8 @@
                   <a:srgbClr val="222733"/>
                 </a:solidFill>
                 <a:latin typeface="맑은 고딕"/>
+                <a:ea typeface="맑은 고딕"/>
+                <a:cs typeface="맑은 고딕"/>
               </a:rPr>
               <a:t>docker inspect web  — 컨테이너의 모든 설정 정보를 JSON으로 확인</a:t>
             </a:r>
@@ -10192,6 +10396,8 @@
                   <a:srgbClr val="0D9488"/>
                 </a:solidFill>
                 <a:latin typeface="맑은 고딕"/>
+                <a:ea typeface="맑은 고딕"/>
+                <a:cs typeface="맑은 고딕"/>
               </a:rPr>
               <a:t>●  </a:t>
             </a:r>
@@ -10201,6 +10407,8 @@
                   <a:srgbClr val="222733"/>
                 </a:solidFill>
                 <a:latin typeface="맑은 고딕"/>
+                <a:ea typeface="맑은 고딕"/>
+                <a:cs typeface="맑은 고딕"/>
               </a:rPr>
               <a:t>docker inspect web | grep IPAddress  — 그중 컨테이너에 할당된 IP만 확인</a:t>
             </a:r>
@@ -10236,6 +10444,8 @@
                   <a:srgbClr val="5B6373"/>
                 </a:solidFill>
                 <a:latin typeface="맑은 고딕"/>
+                <a:ea typeface="맑은 고딕"/>
+                <a:cs typeface="맑은 고딕"/>
               </a:rPr>
               <a:t>클라우드인프라관리  ·  1주차 3차시</a:t>
             </a:r>
@@ -10271,6 +10481,8 @@
                   <a:srgbClr val="5B6373"/>
                 </a:solidFill>
                 <a:latin typeface="맑은 고딕"/>
+                <a:ea typeface="맑은 고딕"/>
+                <a:cs typeface="맑은 고딕"/>
               </a:rPr>
               <a:t>08 / 13</a:t>
             </a:r>
@@ -10474,6 +10686,8 @@
                   <a:srgbClr val="14213D"/>
                 </a:solidFill>
                 <a:latin typeface="맑은 고딕"/>
+                <a:ea typeface="맑은 고딕"/>
+                <a:cs typeface="맑은 고딕"/>
               </a:rPr>
               <a:t>02</a:t>
             </a:r>
@@ -10509,6 +10723,8 @@
                   <a:srgbClr val="14B8A6"/>
                 </a:solidFill>
                 <a:latin typeface="맑은 고딕"/>
+                <a:ea typeface="맑은 고딕"/>
+                <a:cs typeface="맑은 고딕"/>
               </a:rPr>
               <a:t>PART 2 · nginx 실습 심화</a:t>
             </a:r>
@@ -10544,6 +10760,8 @@
                   <a:srgbClr val="FFFFFF"/>
                 </a:solidFill>
                 <a:latin typeface="맑은 고딕"/>
+                <a:ea typeface="맑은 고딕"/>
+                <a:cs typeface="맑은 고딕"/>
               </a:rPr>
               <a:t>docker inspect가 왜 중요한가</a:t>
             </a:r>
@@ -10583,6 +10801,8 @@
                   <a:srgbClr val="0D9488"/>
                 </a:solidFill>
                 <a:latin typeface="맑은 고딕"/>
+                <a:ea typeface="맑은 고딕"/>
+                <a:cs typeface="맑은 고딕"/>
               </a:rPr>
               <a:t>●  </a:t>
             </a:r>
@@ -10592,6 +10812,8 @@
                   <a:srgbClr val="222733"/>
                 </a:solidFill>
                 <a:latin typeface="맑은 고딕"/>
+                <a:ea typeface="맑은 고딕"/>
+                <a:cs typeface="맑은 고딕"/>
               </a:rPr>
               <a:t>컨테이너는 기본적으로 격리되어 있어 밖에서 내부 상태가 안 보임</a:t>
             </a:r>
@@ -10608,6 +10830,8 @@
                   <a:srgbClr val="0D9488"/>
                 </a:solidFill>
                 <a:latin typeface="맑은 고딕"/>
+                <a:ea typeface="맑은 고딕"/>
+                <a:cs typeface="맑은 고딕"/>
               </a:rPr>
               <a:t>●  </a:t>
             </a:r>
@@ -10617,6 +10841,8 @@
                   <a:srgbClr val="222733"/>
                 </a:solidFill>
                 <a:latin typeface="맑은 고딕"/>
+                <a:ea typeface="맑은 고딕"/>
+                <a:cs typeface="맑은 고딕"/>
               </a:rPr>
               <a:t>inspect는 그 컨테이너의 IP, 마운트된 볼륨, 환경변수, 상태 등을 전부 보여줌</a:t>
             </a:r>
@@ -10633,6 +10859,8 @@
                   <a:srgbClr val="0D9488"/>
                 </a:solidFill>
                 <a:latin typeface="맑은 고딕"/>
+                <a:ea typeface="맑은 고딕"/>
+                <a:cs typeface="맑은 고딕"/>
               </a:rPr>
               <a:t>●  </a:t>
             </a:r>
@@ -10642,6 +10870,8 @@
                   <a:srgbClr val="222733"/>
                 </a:solidFill>
                 <a:latin typeface="맑은 고딕"/>
+                <a:ea typeface="맑은 고딕"/>
+                <a:cs typeface="맑은 고딕"/>
               </a:rPr>
               <a:t>실무에서 컨테이너가 이상하게 동작할 때 가장 먼저 확인하는 명령어</a:t>
             </a:r>
@@ -10721,6 +10951,8 @@
                   <a:srgbClr val="FFFFFF"/>
                 </a:solidFill>
                 <a:latin typeface="맑은 고딕"/>
+                <a:ea typeface="맑은 고딕"/>
+                <a:cs typeface="맑은 고딕"/>
               </a:rPr>
               <a:t>🔍  오늘의 목표</a:t>
             </a:r>
@@ -10756,6 +10988,8 @@
                   <a:srgbClr val="FFFFFF"/>
                 </a:solidFill>
                 <a:latin typeface="맑은 고딕"/>
+                <a:ea typeface="맑은 고딕"/>
+                <a:cs typeface="맑은 고딕"/>
               </a:rPr>
               <a:t>nginx 컨테이너를 실행하고, inspect로 그 컨테이너의 IP 주소를 직접 찾아낸다</a:t>
             </a:r>
@@ -10791,6 +11025,8 @@
                   <a:srgbClr val="5B6373"/>
                 </a:solidFill>
                 <a:latin typeface="맑은 고딕"/>
+                <a:ea typeface="맑은 고딕"/>
+                <a:cs typeface="맑은 고딕"/>
               </a:rPr>
               <a:t>클라우드인프라관리  ·  1주차 3차시</a:t>
             </a:r>
@@ -10826,6 +11062,8 @@
                   <a:srgbClr val="5B6373"/>
                 </a:solidFill>
                 <a:latin typeface="맑은 고딕"/>
+                <a:ea typeface="맑은 고딕"/>
+                <a:cs typeface="맑은 고딕"/>
               </a:rPr>
               <a:t>09 / 13</a:t>
             </a:r>

--- a/class/cloud_infra_mgmt/01주차_클라우드개념_Docker입문/01_강의자료/3차시_Docker데몬심화와nginx실습.pptx
+++ b/class/cloud_infra_mgmt/01주차_클라우드개념_Docker입문/01_강의자료/3차시_Docker데몬심화와nginx실습.pptx
@@ -5559,7 +5559,7 @@
                 <a:ea typeface="맑은 고딕"/>
                 <a:cs typeface="맑은 고딕"/>
               </a:rPr>
-              <a:t>10 / 13</a:t>
+              <a:t>10 / 14</a:t>
             </a:r>
           </a:p>
         </p:txBody>
@@ -6051,7 +6051,7 @@
                 <a:ea typeface="맑은 고딕"/>
                 <a:cs typeface="맑은 고딕"/>
               </a:rPr>
-              <a:t>11 / 13</a:t>
+              <a:t>11 / 14</a:t>
             </a:r>
           </a:p>
         </p:txBody>
@@ -7235,7 +7235,7 @@
                 <a:ea typeface="맑은 고딕"/>
                 <a:cs typeface="맑은 고딕"/>
               </a:rPr>
-              <a:t>02 / 13</a:t>
+              <a:t>02 / 14</a:t>
             </a:r>
           </a:p>
         </p:txBody>
@@ -8493,7 +8493,7 @@
                 <a:ea typeface="맑은 고딕"/>
                 <a:cs typeface="맑은 고딕"/>
               </a:rPr>
-              <a:t>03 / 13</a:t>
+              <a:t>03 / 14</a:t>
             </a:r>
           </a:p>
         </p:txBody>
@@ -9176,7 +9176,7 @@
                 <a:ea typeface="맑은 고딕"/>
                 <a:cs typeface="맑은 고딕"/>
               </a:rPr>
-              <a:t>05 / 13</a:t>
+              <a:t>05 / 14</a:t>
             </a:r>
           </a:p>
         </p:txBody>
@@ -9757,7 +9757,7 @@
                 <a:ea typeface="맑은 고딕"/>
                 <a:cs typeface="맑은 고딕"/>
               </a:rPr>
-              <a:t>06 / 13</a:t>
+              <a:t>06 / 14</a:t>
             </a:r>
           </a:p>
         </p:txBody>
@@ -10484,7 +10484,7 @@
                 <a:ea typeface="맑은 고딕"/>
                 <a:cs typeface="맑은 고딕"/>
               </a:rPr>
-              <a:t>08 / 13</a:t>
+              <a:t>08 / 14</a:t>
             </a:r>
           </a:p>
         </p:txBody>
@@ -11065,7 +11065,7 @@
                 <a:ea typeface="맑은 고딕"/>
                 <a:cs typeface="맑은 고딕"/>
               </a:rPr>
-              <a:t>09 / 13</a:t>
+              <a:t>09 / 14</a:t>
             </a:r>
           </a:p>
         </p:txBody>
